--- a/docs/presentation.pptx
+++ b/docs/presentation.pptx
@@ -118,28 +118,28 @@
   <p:extLst>
     <p:ext uri="{521415D9-36F7-43E2-AB2F-B90AF26B5E84}">
       <p14:sectionLst xmlns:p14="http://schemas.microsoft.com/office/powerpoint/2010/main">
-        <p14:section name="Введение" id="{c717affc-0573-1a66-5aab-3ee6574ed550}">
+        <p14:section name="Введение" id="{3683d8ad-821d-a40f-5cc6-3a433cef55c1}">
           <p14:sldIdLst>
             <p14:sldId id="256"/>
             <p14:sldId id="257"/>
             <p14:sldId id="258"/>
           </p14:sldIdLst>
         </p14:section>
-        <p14:section name="Метод" id="{049bdf07-732a-6c35-40a8-d420092ea7c8}">
+        <p14:section name="Метод" id="{6ec7539b-86d1-f5bf-8d12-8dbb68ef416e}">
           <p14:sldIdLst>
             <p14:sldId id="259"/>
             <p14:sldId id="260"/>
             <p14:sldId id="261"/>
           </p14:sldIdLst>
         </p14:section>
-        <p14:section name="Результаты" id="{600518ed-c3ff-cb2d-a671-e583abacc458}">
+        <p14:section name="Результаты" id="{a127178d-3244-f4a1-22ed-26bfdd2c0329}">
           <p14:sldIdLst>
             <p14:sldId id="262"/>
             <p14:sldId id="263"/>
             <p14:sldId id="264"/>
           </p14:sldIdLst>
         </p14:section>
-        <p14:section name="Итоги" id="{707f6f3d-3a1b-7419-6f31-a1ae7bdfe8e4}">
+        <p14:section name="Итоги" id="{048b2e5f-403f-ddae-c37b-3044cf0b1ab9}">
           <p14:sldIdLst>
             <p14:sldId id="265"/>
             <p14:sldId id="266"/>
@@ -1328,7 +1328,7 @@
                   <c:v>56.7</c:v>
                 </c:pt>
                 <c:pt idx="4">
-                  <c:v>65.7</c:v>
+                  <c:v>66.5</c:v>
                 </c:pt>
                 <c:pt idx="5">
                   <c:v>68.7</c:v>
@@ -2570,7 +2570,7 @@
           <a:p>
             <a:r>
               <a:rPr lang="en-US" dirty="0"/>
-              <a:t>Ключевой трюк по памяти: логиты по словарю 152k считаются только на позициях ответа. Пик памяти упал с 7.8 до 6.4 ГБ, скорость выросла вдвое.</a:t>
+              <a:t>Ключевой трюк по памяти: логиты по словарю 152k считаются только на позициях ответа. Первый запуск без этого упал с OOM; на 90-м шаге пик памяти стал 6.6 ГБ вместо 7.8, скорость выросла вдвое (2.5 → 4.9 примера/с).</a:t>
             </a:r>
             <a:endParaRPr lang="en-US" dirty="0"/>
           </a:p>
@@ -4638,7 +4638,7 @@
                   <a:srgbClr val="C3C2B7"/>
                 </a:solidFill>
               </a:rPr>
-              <a:t>Код, адаптер, отчёт и демо: github.com/…/vk-vlm-ru-project</a:t>
+              <a:t>Код, адаптер, отчёт и демо: репозиторий проекта на GitHub</a:t>
             </a:r>
             <a:endParaRPr lang="en-US" sz="1600" dirty="0"/>
           </a:p>
@@ -7871,7 +7871,7 @@
                   <a:srgbClr val="52514E"/>
                 </a:solidFill>
               </a:rPr>
-              <a:t>одна эпоха, 721 шагов</a:t>
+              <a:t>одна эпоха, шагов оптимизатора: 721</a:t>
             </a:r>
             <a:endParaRPr lang="en-US" sz="1300" dirty="0"/>
           </a:p>
@@ -8497,7 +8497,7 @@
                   <a:srgbClr val="52514E"/>
                 </a:solidFill>
               </a:rPr>
-              <a:t>CircularEval; без дообучения — 65.7</a:t>
+              <a:t>CircularEval; без дообучения — 66.5</a:t>
             </a:r>
             <a:endParaRPr lang="en-US" sz="1300" dirty="0"/>
           </a:p>
@@ -8533,7 +8533,7 @@
                   <a:schemeClr val="tx1"/>
                 </a:solidFill>
               </a:rPr>
-              <a:t>+12.1 п.п. к llava-saiga-8b. Прирост к исходной модели — в основном формат: она в 5.0% случаев рассуждала вместо буквы</a:t>
+              <a:t>+12.1 п.п. к llava-saiga-8b. Прирост к исходной модели — в основном формат: она в 6.0% случаев рассуждала вместо буквы</a:t>
             </a:r>
             <a:endParaRPr lang="en-US" sz="1300" dirty="0"/>
           </a:p>
@@ -8569,7 +8569,7 @@
                   <a:srgbClr val="898781"/>
                 </a:solidFill>
               </a:rPr>
-              <a:t>Верхняя граница исходной модели — 70.6: вывод «общие навыки не пострадали»</a:t>
+              <a:t>Верхняя граница исходной модели — 72.1: вывод «общие навыки не пострадали»</a:t>
             </a:r>
             <a:endParaRPr lang="en-US" sz="1100" dirty="0"/>
           </a:p>

--- a/docs/presentation.pptx
+++ b/docs/presentation.pptx
@@ -118,28 +118,28 @@
   <p:extLst>
     <p:ext uri="{521415D9-36F7-43E2-AB2F-B90AF26B5E84}">
       <p14:sectionLst xmlns:p14="http://schemas.microsoft.com/office/powerpoint/2010/main">
-        <p14:section name="Введение" id="{3683d8ad-821d-a40f-5cc6-3a433cef55c1}">
+        <p14:section name="Введение" id="{877f167b-2bc6-5f47-df02-131110ca2101}">
           <p14:sldIdLst>
             <p14:sldId id="256"/>
             <p14:sldId id="257"/>
             <p14:sldId id="258"/>
           </p14:sldIdLst>
         </p14:section>
-        <p14:section name="Метод" id="{6ec7539b-86d1-f5bf-8d12-8dbb68ef416e}">
+        <p14:section name="Метод" id="{122bd1be-3783-797b-9f48-34e6a597718a}">
           <p14:sldIdLst>
             <p14:sldId id="259"/>
             <p14:sldId id="260"/>
             <p14:sldId id="261"/>
           </p14:sldIdLst>
         </p14:section>
-        <p14:section name="Результаты" id="{a127178d-3244-f4a1-22ed-26bfdd2c0329}">
+        <p14:section name="Результаты" id="{c6b6aeed-5a05-05e2-36b1-d8d585e92b2b}">
           <p14:sldIdLst>
             <p14:sldId id="262"/>
             <p14:sldId id="263"/>
             <p14:sldId id="264"/>
           </p14:sldIdLst>
         </p14:section>
-        <p14:section name="Итоги" id="{048b2e5f-403f-ddae-c37b-3044cf0b1ab9}">
+        <p14:section name="Итоги" id="{e6763628-c5ed-7197-2c55-18c05db708a7}">
           <p14:sldIdLst>
             <p14:sldId id="265"/>
             <p14:sldId id="266"/>
@@ -4638,7 +4638,7 @@
                   <a:srgbClr val="C3C2B7"/>
                 </a:solidFill>
               </a:rPr>
-              <a:t>Код, адаптер, отчёт и демо: репозиторий проекта на GitHub</a:t>
+              <a:t>Код, адаптер, отчёт и демо: github.com/geozasimov/vk_vlm_project</a:t>
             </a:r>
             <a:endParaRPr lang="en-US" sz="1600" dirty="0"/>
           </a:p>
